--- a/praesentation/Neue-Mitte-Werlte_Baufeld3_Hotel-und-Gastro.pptx
+++ b/praesentation/Neue-Mitte-Werlte_Baufeld3_Hotel-und-Gastro.pptx
@@ -13,9 +13,10 @@
     <p:sldId id="261" r:id="rId7"/>
     <p:sldId id="262" r:id="rId8"/>
     <p:sldId id="263" r:id="rId9"/>
+    <p:sldId id="264" r:id="rId10"/>
   </p:sldIdLst>
   <p:notesMasterIdLst>
-    <p:notesMasterId r:id="rId10"/>
+    <p:notesMasterId r:id="rId11"/>
   </p:notesMasterIdLst>
   <p:sldSz cx="12192000" cy="6858000"/>
   <p:notesSz cx="6858000" cy="12192000"/>
@@ -1037,7 +1038,7 @@
           <a:p>
             <a:r>
               <a:rPr lang="en-US" dirty="0"/>
-              <a:t>Bitte mit Bauamt und Brandschutz klären, die Hinweise sind keine Rechtsberatung.</a:t>
+              <a:t>Jede Einheit mit eigenem Kredit ohne Eigenkapital. Käufer zahlen 3,3 % Zins; Preis für das Plus: nur Zinsen, ohne Tilgung. Hotelzimmer als Anlage: Betreiber zahlt 22 % vom Umsatz als Pacht, verteilt auf die Zimmer.</a:t>
             </a:r>
             <a:endParaRPr lang="en-US" dirty="0"/>
           </a:p>
@@ -1125,6 +1126,94 @@
           <a:p>
             <a:r>
               <a:rPr lang="en-US" dirty="0"/>
+              <a:t>Bitte mit Bauamt und Brandschutz klären, die Hinweise sind keine Rechtsberatung.</a:t>
+            </a:r>
+            <a:endParaRPr lang="en-US" dirty="0"/>
+          </a:p>
+        </p:txBody>
+      </p:sp>
+      <p:sp>
+        <p:nvSpPr>
+          <p:cNvPr id="4" name="Slide Number Placeholder 3"/>
+          <p:cNvSpPr>
+            <a:spLocks noGrp="1"/>
+          </p:cNvSpPr>
+          <p:nvPr>
+            <p:ph type="sldNum" sz="quarter" idx="10"/>
+          </p:nvPr>
+        </p:nvSpPr>
+        <p:spPr/>
+        <p:txBody>
+          <a:bodyPr/>
+          <a:lstStyle/>
+          <a:p>
+            <a:fld id="{F7021451-1387-4CA6-816F-3879F97B5CBC}" type="slidenum">
+              <a:rPr lang="en-US"/>
+              <a:t>8</a:t>
+            </a:fld>
+            <a:endParaRPr lang="en-US"/>
+          </a:p>
+        </p:txBody>
+      </p:sp>
+    </p:spTree>
+    <p:extLst>
+      <p:ext uri="{BB962C8B-B14F-4D97-AF65-F5344CB8AC3E}">
+        <p14:creationId xmlns:p14="http://schemas.microsoft.com/office/powerpoint/2010/main" val="1024086991"/>
+      </p:ext>
+    </p:extLst>
+  </p:cSld>
+  <p:clrMapOvr>
+    <a:masterClrMapping/>
+  </p:clrMapOvr>
+</p:notes>
+</file>
+
+<file path=ppt/notesSlides/notesSlide9.xml><?xml version="1.0" encoding="utf-8"?>
+<p:notes xmlns:a="http://schemas.openxmlformats.org/drawingml/2006/main" xmlns:r="http://schemas.openxmlformats.org/officeDocument/2006/relationships" xmlns:p="http://schemas.openxmlformats.org/presentationml/2006/main">
+  <p:cSld>
+    <p:spTree>
+      <p:nvGrpSpPr>
+        <p:cNvPr id="1" name=""/>
+        <p:cNvGrpSpPr/>
+        <p:nvPr/>
+      </p:nvGrpSpPr>
+      <p:grpSpPr>
+        <a:xfrm>
+          <a:off x="0" y="0"/>
+          <a:ext cx="0" cy="0"/>
+          <a:chOff x="0" y="0"/>
+          <a:chExt cx="0" cy="0"/>
+        </a:xfrm>
+      </p:grpSpPr>
+      <p:sp>
+        <p:nvSpPr>
+          <p:cNvPr id="2" name="Slide Image Placeholder 1"/>
+          <p:cNvSpPr>
+            <a:spLocks noGrp="1" noRot="1" noChangeAspect="1"/>
+          </p:cNvSpPr>
+          <p:nvPr>
+            <p:ph type="sldImg"/>
+          </p:nvPr>
+        </p:nvSpPr>
+        <p:spPr/>
+      </p:sp>
+      <p:sp>
+        <p:nvSpPr>
+          <p:cNvPr id="3" name="Notes Placeholder 2"/>
+          <p:cNvSpPr>
+            <a:spLocks noGrp="1"/>
+          </p:cNvSpPr>
+          <p:nvPr>
+            <p:ph type="body" idx="1"/>
+          </p:nvPr>
+        </p:nvSpPr>
+        <p:spPr/>
+        <p:txBody>
+          <a:bodyPr/>
+          <a:lstStyle/>
+          <a:p>
+            <a:r>
+              <a:rPr lang="en-US" dirty="0"/>
               <a:t/>
             </a:r>
             <a:endParaRPr lang="en-US" dirty="0"/>
@@ -1148,7 +1237,7 @@
           <a:p>
             <a:fld id="{F7021451-1387-4CA6-816F-3879F97B5CBC}" type="slidenum">
               <a:rPr lang="en-US"/>
-              <a:t>8</a:t>
+              <a:t>9</a:t>
             </a:fld>
             <a:endParaRPr lang="en-US"/>
           </a:p>
@@ -10154,6 +10243,1322 @@
                 <a:ea typeface="Georgia" pitchFamily="34" charset="-122"/>
                 <a:cs typeface="Georgia" pitchFamily="34" charset="-120"/>
               </a:rPr>
+              <a:t>Verkauf an die Verwandten</a:t>
+            </a:r>
+            <a:endParaRPr lang="en-US" sz="2700" dirty="0"/>
+          </a:p>
+        </p:txBody>
+      </p:sp>
+      <p:sp>
+        <p:nvSpPr>
+          <p:cNvPr id="3" name="Zielgruppe"/>
+          <p:cNvSpPr txBox="1"/>
+          <p:nvPr/>
+        </p:nvSpPr>
+        <p:spPr>
+          <a:xfrm>
+            <a:off x="548640" y="6446520"/>
+            <a:ext cx="5486400" cy="274320"/>
+          </a:xfrm>
+          <a:prstGeom prst="rect">
+            <a:avLst/>
+          </a:prstGeom>
+          <a:noFill/>
+          <a:ln/>
+        </p:spPr>
+        <p:txBody>
+          <a:bodyPr wrap="square" lIns="0" tIns="0" rIns="0" bIns="0" rtlCol="0" anchor="ctr"/>
+          <a:lstStyle/>
+          <a:p>
+            <a:pPr indent="0" marL="0">
+              <a:buNone/>
+            </a:pPr>
+            <a:r>
+              <a:rPr lang="en-US" sz="1000" dirty="0">
+                <a:solidFill>
+                  <a:schemeClr val="accent4"/>
+                </a:solidFill>
+              </a:rPr>
+              <a:t>Ausarbeitung 2</a:t>
+            </a:r>
+            <a:endParaRPr lang="en-US" sz="1000" dirty="0"/>
+          </a:p>
+        </p:txBody>
+      </p:sp>
+      <p:graphicFrame>
+        <p:nvGraphicFramePr>
+          <p:cNvPr id="8" name="Tabelle Verkauf Verwandte"/>
+          <p:cNvGraphicFramePr>
+            <a:graphicFrameLocks noGrp="1"/>
+          </p:cNvGraphicFramePr>
+          <p:nvPr>
+            <p:extLst>
+              <p:ext uri="{D42A27DB-BD31-4B8C-83A1-F6EECF244321}">
+                <p14:modId xmlns:p14="http://schemas.microsoft.com/office/powerpoint/2010/main" val="1579011935"/>
+              </p:ext>
+            </p:extLst>
+          </p:nvPr>
+        </p:nvGraphicFramePr>
+        <p:xfrm>
+          <a:off x="548640" y="1371600"/>
+          <a:ext cx="11091672" cy="914400"/>
+        </p:xfrm>
+        <a:graphic>
+          <a:graphicData uri="http://schemas.openxmlformats.org/drawingml/2006/table">
+            <a:tbl>
+              <a:tblPr/>
+              <a:tblGrid>
+                <a:gridCol w="1554480"/>
+                <a:gridCol w="822960"/>
+                <a:gridCol w="1463040"/>
+                <a:gridCol w="1463040"/>
+                <a:gridCol w="1554480"/>
+                <a:gridCol w="1280160"/>
+                <a:gridCol w="1463040"/>
+                <a:gridCol w="1490472"/>
+              </a:tblGrid>
+              <a:tr h="548640">
+                <a:tc>
+                  <a:txBody>
+                    <a:bodyPr/>
+                    <a:lstStyle/>
+                    <a:p>
+                      <a:pPr algn="l" indent="0" marL="0">
+                        <a:buNone/>
+                      </a:pPr>
+                      <a:r>
+                        <a:rPr lang="en-US" sz="1250" b="1" dirty="0">
+                          <a:solidFill>
+                            <a:schemeClr val="bg1"/>
+                          </a:solidFill>
+                          <a:latin typeface="Arial" pitchFamily="34" charset="0"/>
+                          <a:ea typeface="Arial" pitchFamily="34" charset="-122"/>
+                          <a:cs typeface="Arial" pitchFamily="34" charset="-120"/>
+                        </a:rPr>
+                        <a:t>Einheit</a:t>
+                      </a:r>
+                      <a:endParaRPr lang="en-US" sz="1250" dirty="0">
+                        <a:latin typeface="Arial" charset="0"/>
+                        <a:ea typeface="Arial" charset="0"/>
+                        <a:cs typeface="Arial" charset="0"/>
+                      </a:endParaRPr>
+                    </a:p>
+                  </a:txBody>
+                  <a:tcPr marL="91440" marR="91440" marT="45720" marB="45720">
+                    <a:lnL w="12700" cap="flat" cmpd="sng" algn="ctr">
+                      <a:solidFill>
+                        <a:srgbClr val="FFFFFF"/>
+                      </a:solidFill>
+                      <a:prstDash val="solid"/>
+                      <a:round/>
+                      <a:headEnd type="none" w="med" len="med"/>
+                      <a:tailEnd type="none" w="med" len="med"/>
+                    </a:lnL>
+                    <a:lnR w="12700" cap="flat" cmpd="sng" algn="ctr">
+                      <a:solidFill>
+                        <a:srgbClr val="FFFFFF"/>
+                      </a:solidFill>
+                      <a:prstDash val="solid"/>
+                      <a:round/>
+                      <a:headEnd type="none" w="med" len="med"/>
+                      <a:tailEnd type="none" w="med" len="med"/>
+                    </a:lnR>
+                    <a:lnT w="12700" cap="flat" cmpd="sng" algn="ctr">
+                      <a:solidFill>
+                        <a:srgbClr val="FFFFFF"/>
+                      </a:solidFill>
+                      <a:prstDash val="solid"/>
+                      <a:round/>
+                      <a:headEnd type="none" w="med" len="med"/>
+                      <a:tailEnd type="none" w="med" len="med"/>
+                    </a:lnT>
+                    <a:lnB w="12700" cap="flat" cmpd="sng" algn="ctr">
+                      <a:solidFill>
+                        <a:srgbClr val="FFFFFF"/>
+                      </a:solidFill>
+                      <a:prstDash val="solid"/>
+                      <a:round/>
+                      <a:headEnd type="none" w="med" len="med"/>
+                      <a:tailEnd type="none" w="med" len="med"/>
+                    </a:lnB>
+                    <a:solidFill>
+                      <a:schemeClr val="accent2"/>
+                    </a:solidFill>
+                  </a:tcPr>
+                </a:tc>
+                <a:tc>
+                  <a:txBody>
+                    <a:bodyPr/>
+                    <a:lstStyle/>
+                    <a:p>
+                      <a:pPr algn="r" indent="0" marL="0">
+                        <a:buNone/>
+                      </a:pPr>
+                      <a:r>
+                        <a:rPr lang="en-US" sz="1250" b="1" dirty="0">
+                          <a:solidFill>
+                            <a:schemeClr val="bg1"/>
+                          </a:solidFill>
+                          <a:latin typeface="Arial" pitchFamily="34" charset="0"/>
+                          <a:ea typeface="Arial" pitchFamily="34" charset="-122"/>
+                          <a:cs typeface="Arial" pitchFamily="34" charset="-120"/>
+                        </a:rPr>
+                        <a:t>Anzahl</a:t>
+                      </a:r>
+                      <a:endParaRPr lang="en-US" sz="1250" dirty="0">
+                        <a:latin typeface="Arial" charset="0"/>
+                        <a:ea typeface="Arial" charset="0"/>
+                        <a:cs typeface="Arial" charset="0"/>
+                      </a:endParaRPr>
+                    </a:p>
+                  </a:txBody>
+                  <a:tcPr marL="91440" marR="91440" marT="45720" marB="45720">
+                    <a:lnL w="12700" cap="flat" cmpd="sng" algn="ctr">
+                      <a:solidFill>
+                        <a:srgbClr val="FFFFFF"/>
+                      </a:solidFill>
+                      <a:prstDash val="solid"/>
+                      <a:round/>
+                      <a:headEnd type="none" w="med" len="med"/>
+                      <a:tailEnd type="none" w="med" len="med"/>
+                    </a:lnL>
+                    <a:lnR w="12700" cap="flat" cmpd="sng" algn="ctr">
+                      <a:solidFill>
+                        <a:srgbClr val="FFFFFF"/>
+                      </a:solidFill>
+                      <a:prstDash val="solid"/>
+                      <a:round/>
+                      <a:headEnd type="none" w="med" len="med"/>
+                      <a:tailEnd type="none" w="med" len="med"/>
+                    </a:lnR>
+                    <a:lnT w="12700" cap="flat" cmpd="sng" algn="ctr">
+                      <a:solidFill>
+                        <a:srgbClr val="FFFFFF"/>
+                      </a:solidFill>
+                      <a:prstDash val="solid"/>
+                      <a:round/>
+                      <a:headEnd type="none" w="med" len="med"/>
+                      <a:tailEnd type="none" w="med" len="med"/>
+                    </a:lnT>
+                    <a:lnB w="12700" cap="flat" cmpd="sng" algn="ctr">
+                      <a:solidFill>
+                        <a:srgbClr val="FFFFFF"/>
+                      </a:solidFill>
+                      <a:prstDash val="solid"/>
+                      <a:round/>
+                      <a:headEnd type="none" w="med" len="med"/>
+                      <a:tailEnd type="none" w="med" len="med"/>
+                    </a:lnB>
+                    <a:solidFill>
+                      <a:schemeClr val="accent2"/>
+                    </a:solidFill>
+                  </a:tcPr>
+                </a:tc>
+                <a:tc>
+                  <a:txBody>
+                    <a:bodyPr/>
+                    <a:lstStyle/>
+                    <a:p>
+                      <a:pPr algn="r" indent="0" marL="0">
+                        <a:buNone/>
+                      </a:pPr>
+                      <a:r>
+                        <a:rPr lang="en-US" sz="1250" b="1" dirty="0">
+                          <a:solidFill>
+                            <a:schemeClr val="bg1"/>
+                          </a:solidFill>
+                          <a:latin typeface="Arial" pitchFamily="34" charset="0"/>
+                          <a:ea typeface="Arial" pitchFamily="34" charset="-122"/>
+                          <a:cs typeface="Arial" pitchFamily="34" charset="-120"/>
+                        </a:rPr>
+                        <a:t>Selbstkosten</a:t>
+                      </a:r>
+                      <a:endParaRPr lang="en-US" sz="1250" dirty="0">
+                        <a:latin typeface="Arial" charset="0"/>
+                        <a:ea typeface="Arial" charset="0"/>
+                        <a:cs typeface="Arial" charset="0"/>
+                      </a:endParaRPr>
+                    </a:p>
+                  </a:txBody>
+                  <a:tcPr marL="91440" marR="91440" marT="45720" marB="45720">
+                    <a:lnL w="12700" cap="flat" cmpd="sng" algn="ctr">
+                      <a:solidFill>
+                        <a:srgbClr val="FFFFFF"/>
+                      </a:solidFill>
+                      <a:prstDash val="solid"/>
+                      <a:round/>
+                      <a:headEnd type="none" w="med" len="med"/>
+                      <a:tailEnd type="none" w="med" len="med"/>
+                    </a:lnL>
+                    <a:lnR w="12700" cap="flat" cmpd="sng" algn="ctr">
+                      <a:solidFill>
+                        <a:srgbClr val="FFFFFF"/>
+                      </a:solidFill>
+                      <a:prstDash val="solid"/>
+                      <a:round/>
+                      <a:headEnd type="none" w="med" len="med"/>
+                      <a:tailEnd type="none" w="med" len="med"/>
+                    </a:lnR>
+                    <a:lnT w="12700" cap="flat" cmpd="sng" algn="ctr">
+                      <a:solidFill>
+                        <a:srgbClr val="FFFFFF"/>
+                      </a:solidFill>
+                      <a:prstDash val="solid"/>
+                      <a:round/>
+                      <a:headEnd type="none" w="med" len="med"/>
+                      <a:tailEnd type="none" w="med" len="med"/>
+                    </a:lnT>
+                    <a:lnB w="12700" cap="flat" cmpd="sng" algn="ctr">
+                      <a:solidFill>
+                        <a:srgbClr val="FFFFFF"/>
+                      </a:solidFill>
+                      <a:prstDash val="solid"/>
+                      <a:round/>
+                      <a:headEnd type="none" w="med" len="med"/>
+                      <a:tailEnd type="none" w="med" len="med"/>
+                    </a:lnB>
+                    <a:solidFill>
+                      <a:schemeClr val="accent2"/>
+                    </a:solidFill>
+                  </a:tcPr>
+                </a:tc>
+                <a:tc>
+                  <a:txBody>
+                    <a:bodyPr/>
+                    <a:lstStyle/>
+                    <a:p>
+                      <a:pPr algn="r" indent="0" marL="0">
+                        <a:buNone/>
+                      </a:pPr>
+                      <a:r>
+                        <a:rPr lang="en-US" sz="1250" b="1" dirty="0">
+                          <a:solidFill>
+                            <a:schemeClr val="bg1"/>
+                          </a:solidFill>
+                          <a:latin typeface="Arial" pitchFamily="34" charset="0"/>
+                          <a:ea typeface="Arial" pitchFamily="34" charset="-122"/>
+                          <a:cs typeface="Arial" pitchFamily="34" charset="-120"/>
+                        </a:rPr>
+                        <a:t>Rate (1 % Tilgung)</a:t>
+                      </a:r>
+                      <a:endParaRPr lang="en-US" sz="1250" dirty="0">
+                        <a:latin typeface="Arial" charset="0"/>
+                        <a:ea typeface="Arial" charset="0"/>
+                        <a:cs typeface="Arial" charset="0"/>
+                      </a:endParaRPr>
+                    </a:p>
+                  </a:txBody>
+                  <a:tcPr marL="91440" marR="91440" marT="45720" marB="45720">
+                    <a:lnL w="12700" cap="flat" cmpd="sng" algn="ctr">
+                      <a:solidFill>
+                        <a:srgbClr val="FFFFFF"/>
+                      </a:solidFill>
+                      <a:prstDash val="solid"/>
+                      <a:round/>
+                      <a:headEnd type="none" w="med" len="med"/>
+                      <a:tailEnd type="none" w="med" len="med"/>
+                    </a:lnL>
+                    <a:lnR w="12700" cap="flat" cmpd="sng" algn="ctr">
+                      <a:solidFill>
+                        <a:srgbClr val="FFFFFF"/>
+                      </a:solidFill>
+                      <a:prstDash val="solid"/>
+                      <a:round/>
+                      <a:headEnd type="none" w="med" len="med"/>
+                      <a:tailEnd type="none" w="med" len="med"/>
+                    </a:lnR>
+                    <a:lnT w="12700" cap="flat" cmpd="sng" algn="ctr">
+                      <a:solidFill>
+                        <a:srgbClr val="FFFFFF"/>
+                      </a:solidFill>
+                      <a:prstDash val="solid"/>
+                      <a:round/>
+                      <a:headEnd type="none" w="med" len="med"/>
+                      <a:tailEnd type="none" w="med" len="med"/>
+                    </a:lnT>
+                    <a:lnB w="12700" cap="flat" cmpd="sng" algn="ctr">
+                      <a:solidFill>
+                        <a:srgbClr val="FFFFFF"/>
+                      </a:solidFill>
+                      <a:prstDash val="solid"/>
+                      <a:round/>
+                      <a:headEnd type="none" w="med" len="med"/>
+                      <a:tailEnd type="none" w="med" len="med"/>
+                    </a:lnB>
+                    <a:solidFill>
+                      <a:schemeClr val="accent2"/>
+                    </a:solidFill>
+                  </a:tcPr>
+                </a:tc>
+                <a:tc>
+                  <a:txBody>
+                    <a:bodyPr/>
+                    <a:lstStyle/>
+                    <a:p>
+                      <a:pPr algn="r" indent="0" marL="0">
+                        <a:buNone/>
+                      </a:pPr>
+                      <a:r>
+                        <a:rPr lang="en-US" sz="1250" b="1" dirty="0">
+                          <a:solidFill>
+                            <a:schemeClr val="bg1"/>
+                          </a:solidFill>
+                          <a:latin typeface="Arial" pitchFamily="34" charset="0"/>
+                          <a:ea typeface="Arial" pitchFamily="34" charset="-122"/>
+                          <a:cs typeface="Arial" pitchFamily="34" charset="-120"/>
+                        </a:rPr>
+                        <a:t>Einnahme pro Monat</a:t>
+                      </a:r>
+                      <a:endParaRPr lang="en-US" sz="1250" dirty="0">
+                        <a:latin typeface="Arial" charset="0"/>
+                        <a:ea typeface="Arial" charset="0"/>
+                        <a:cs typeface="Arial" charset="0"/>
+                      </a:endParaRPr>
+                    </a:p>
+                  </a:txBody>
+                  <a:tcPr marL="91440" marR="91440" marT="45720" marB="45720">
+                    <a:lnL w="12700" cap="flat" cmpd="sng" algn="ctr">
+                      <a:solidFill>
+                        <a:srgbClr val="FFFFFF"/>
+                      </a:solidFill>
+                      <a:prstDash val="solid"/>
+                      <a:round/>
+                      <a:headEnd type="none" w="med" len="med"/>
+                      <a:tailEnd type="none" w="med" len="med"/>
+                    </a:lnL>
+                    <a:lnR w="12700" cap="flat" cmpd="sng" algn="ctr">
+                      <a:solidFill>
+                        <a:srgbClr val="FFFFFF"/>
+                      </a:solidFill>
+                      <a:prstDash val="solid"/>
+                      <a:round/>
+                      <a:headEnd type="none" w="med" len="med"/>
+                      <a:tailEnd type="none" w="med" len="med"/>
+                    </a:lnR>
+                    <a:lnT w="12700" cap="flat" cmpd="sng" algn="ctr">
+                      <a:solidFill>
+                        <a:srgbClr val="FFFFFF"/>
+                      </a:solidFill>
+                      <a:prstDash val="solid"/>
+                      <a:round/>
+                      <a:headEnd type="none" w="med" len="med"/>
+                      <a:tailEnd type="none" w="med" len="med"/>
+                    </a:lnT>
+                    <a:lnB w="12700" cap="flat" cmpd="sng" algn="ctr">
+                      <a:solidFill>
+                        <a:srgbClr val="FFFFFF"/>
+                      </a:solidFill>
+                      <a:prstDash val="solid"/>
+                      <a:round/>
+                      <a:headEnd type="none" w="med" len="med"/>
+                      <a:tailEnd type="none" w="med" len="med"/>
+                    </a:lnB>
+                    <a:solidFill>
+                      <a:schemeClr val="accent2"/>
+                    </a:solidFill>
+                  </a:tcPr>
+                </a:tc>
+                <a:tc>
+                  <a:txBody>
+                    <a:bodyPr/>
+                    <a:lstStyle/>
+                    <a:p>
+                      <a:pPr algn="r" indent="0" marL="0">
+                        <a:buNone/>
+                      </a:pPr>
+                      <a:r>
+                        <a:rPr lang="en-US" sz="1250" b="1" dirty="0">
+                          <a:solidFill>
+                            <a:schemeClr val="bg1"/>
+                          </a:solidFill>
+                          <a:latin typeface="Arial" pitchFamily="34" charset="0"/>
+                          <a:ea typeface="Arial" pitchFamily="34" charset="-122"/>
+                          <a:cs typeface="Arial" pitchFamily="34" charset="-120"/>
+                        </a:rPr>
+                        <a:t>Ergebnis</a:t>
+                      </a:r>
+                      <a:endParaRPr lang="en-US" sz="1250" dirty="0">
+                        <a:latin typeface="Arial" charset="0"/>
+                        <a:ea typeface="Arial" charset="0"/>
+                        <a:cs typeface="Arial" charset="0"/>
+                      </a:endParaRPr>
+                    </a:p>
+                  </a:txBody>
+                  <a:tcPr marL="91440" marR="91440" marT="45720" marB="45720">
+                    <a:lnL w="12700" cap="flat" cmpd="sng" algn="ctr">
+                      <a:solidFill>
+                        <a:srgbClr val="FFFFFF"/>
+                      </a:solidFill>
+                      <a:prstDash val="solid"/>
+                      <a:round/>
+                      <a:headEnd type="none" w="med" len="med"/>
+                      <a:tailEnd type="none" w="med" len="med"/>
+                    </a:lnL>
+                    <a:lnR w="12700" cap="flat" cmpd="sng" algn="ctr">
+                      <a:solidFill>
+                        <a:srgbClr val="FFFFFF"/>
+                      </a:solidFill>
+                      <a:prstDash val="solid"/>
+                      <a:round/>
+                      <a:headEnd type="none" w="med" len="med"/>
+                      <a:tailEnd type="none" w="med" len="med"/>
+                    </a:lnR>
+                    <a:lnT w="12700" cap="flat" cmpd="sng" algn="ctr">
+                      <a:solidFill>
+                        <a:srgbClr val="FFFFFF"/>
+                      </a:solidFill>
+                      <a:prstDash val="solid"/>
+                      <a:round/>
+                      <a:headEnd type="none" w="med" len="med"/>
+                      <a:tailEnd type="none" w="med" len="med"/>
+                    </a:lnT>
+                    <a:lnB w="12700" cap="flat" cmpd="sng" algn="ctr">
+                      <a:solidFill>
+                        <a:srgbClr val="FFFFFF"/>
+                      </a:solidFill>
+                      <a:prstDash val="solid"/>
+                      <a:round/>
+                      <a:headEnd type="none" w="med" len="med"/>
+                      <a:tailEnd type="none" w="med" len="med"/>
+                    </a:lnB>
+                    <a:solidFill>
+                      <a:schemeClr val="accent2"/>
+                    </a:solidFill>
+                  </a:tcPr>
+                </a:tc>
+                <a:tc>
+                  <a:txBody>
+                    <a:bodyPr/>
+                    <a:lstStyle/>
+                    <a:p>
+                      <a:pPr algn="r" indent="0" marL="0">
+                        <a:buNone/>
+                      </a:pPr>
+                      <a:r>
+                        <a:rPr lang="en-US" sz="1250" b="1" dirty="0">
+                          <a:solidFill>
+                            <a:schemeClr val="bg1"/>
+                          </a:solidFill>
+                          <a:latin typeface="Arial" pitchFamily="34" charset="0"/>
+                          <a:ea typeface="Arial" pitchFamily="34" charset="-122"/>
+                          <a:cs typeface="Arial" pitchFamily="34" charset="-120"/>
+                        </a:rPr>
+                        <a:t>Preis für +250 €</a:t>
+                      </a:r>
+                      <a:endParaRPr lang="en-US" sz="1250" dirty="0">
+                        <a:latin typeface="Arial" charset="0"/>
+                        <a:ea typeface="Arial" charset="0"/>
+                        <a:cs typeface="Arial" charset="0"/>
+                      </a:endParaRPr>
+                    </a:p>
+                  </a:txBody>
+                  <a:tcPr marL="91440" marR="91440" marT="45720" marB="45720">
+                    <a:lnL w="12700" cap="flat" cmpd="sng" algn="ctr">
+                      <a:solidFill>
+                        <a:srgbClr val="FFFFFF"/>
+                      </a:solidFill>
+                      <a:prstDash val="solid"/>
+                      <a:round/>
+                      <a:headEnd type="none" w="med" len="med"/>
+                      <a:tailEnd type="none" w="med" len="med"/>
+                    </a:lnL>
+                    <a:lnR w="12700" cap="flat" cmpd="sng" algn="ctr">
+                      <a:solidFill>
+                        <a:srgbClr val="FFFFFF"/>
+                      </a:solidFill>
+                      <a:prstDash val="solid"/>
+                      <a:round/>
+                      <a:headEnd type="none" w="med" len="med"/>
+                      <a:tailEnd type="none" w="med" len="med"/>
+                    </a:lnR>
+                    <a:lnT w="12700" cap="flat" cmpd="sng" algn="ctr">
+                      <a:solidFill>
+                        <a:srgbClr val="FFFFFF"/>
+                      </a:solidFill>
+                      <a:prstDash val="solid"/>
+                      <a:round/>
+                      <a:headEnd type="none" w="med" len="med"/>
+                      <a:tailEnd type="none" w="med" len="med"/>
+                    </a:lnT>
+                    <a:lnB w="12700" cap="flat" cmpd="sng" algn="ctr">
+                      <a:solidFill>
+                        <a:srgbClr val="FFFFFF"/>
+                      </a:solidFill>
+                      <a:prstDash val="solid"/>
+                      <a:round/>
+                      <a:headEnd type="none" w="med" len="med"/>
+                      <a:tailEnd type="none" w="med" len="med"/>
+                    </a:lnB>
+                    <a:solidFill>
+                      <a:schemeClr val="accent2"/>
+                    </a:solidFill>
+                  </a:tcPr>
+                </a:tc>
+                <a:tc>
+                  <a:txBody>
+                    <a:bodyPr/>
+                    <a:lstStyle/>
+                    <a:p>
+                      <a:pPr algn="r" indent="0" marL="0">
+                        <a:buNone/>
+                      </a:pPr>
+                      <a:r>
+                        <a:rPr lang="en-US" sz="1250" b="1" dirty="0">
+                          <a:solidFill>
+                            <a:schemeClr val="bg1"/>
+                          </a:solidFill>
+                          <a:latin typeface="Arial" pitchFamily="34" charset="0"/>
+                          <a:ea typeface="Arial" pitchFamily="34" charset="-122"/>
+                          <a:cs typeface="Arial" pitchFamily="34" charset="-120"/>
+                        </a:rPr>
+                        <a:t>Differenz je Einheit</a:t>
+                      </a:r>
+                      <a:endParaRPr lang="en-US" sz="1250" dirty="0">
+                        <a:latin typeface="Arial" charset="0"/>
+                        <a:ea typeface="Arial" charset="0"/>
+                        <a:cs typeface="Arial" charset="0"/>
+                      </a:endParaRPr>
+                    </a:p>
+                  </a:txBody>
+                  <a:tcPr marL="91440" marR="91440" marT="45720" marB="45720">
+                    <a:lnL w="12700" cap="flat" cmpd="sng" algn="ctr">
+                      <a:solidFill>
+                        <a:srgbClr val="FFFFFF"/>
+                      </a:solidFill>
+                      <a:prstDash val="solid"/>
+                      <a:round/>
+                      <a:headEnd type="none" w="med" len="med"/>
+                      <a:tailEnd type="none" w="med" len="med"/>
+                    </a:lnL>
+                    <a:lnR w="12700" cap="flat" cmpd="sng" algn="ctr">
+                      <a:solidFill>
+                        <a:srgbClr val="FFFFFF"/>
+                      </a:solidFill>
+                      <a:prstDash val="solid"/>
+                      <a:round/>
+                      <a:headEnd type="none" w="med" len="med"/>
+                      <a:tailEnd type="none" w="med" len="med"/>
+                    </a:lnR>
+                    <a:lnT w="12700" cap="flat" cmpd="sng" algn="ctr">
+                      <a:solidFill>
+                        <a:srgbClr val="FFFFFF"/>
+                      </a:solidFill>
+                      <a:prstDash val="solid"/>
+                      <a:round/>
+                      <a:headEnd type="none" w="med" len="med"/>
+                      <a:tailEnd type="none" w="med" len="med"/>
+                    </a:lnT>
+                    <a:lnB w="12700" cap="flat" cmpd="sng" algn="ctr">
+                      <a:solidFill>
+                        <a:srgbClr val="FFFFFF"/>
+                      </a:solidFill>
+                      <a:prstDash val="solid"/>
+                      <a:round/>
+                      <a:headEnd type="none" w="med" len="med"/>
+                      <a:tailEnd type="none" w="med" len="med"/>
+                    </a:lnB>
+                    <a:solidFill>
+                      <a:schemeClr val="accent2"/>
+                    </a:solidFill>
+                  </a:tcPr>
+                </a:tc>
+              </a:tr>
+              <a:tr h="548640">
+                <a:tc>
+                  <a:txBody>
+                    <a:bodyPr/>
+                    <a:lstStyle/>
+                    <a:p>
+                      <a:pPr indent="0" marL="0">
+                        <a:buNone/>
+                      </a:pPr>
+                      <a:r>
+                        <a:rPr lang="en-US" sz="1250" dirty="0">
+                          <a:solidFill>
+                            <a:srgbClr val="000000"/>
+                          </a:solidFill>
+                          <a:latin typeface="Arial" pitchFamily="34" charset="0"/>
+                          <a:ea typeface="Arial" pitchFamily="34" charset="-122"/>
+                          <a:cs typeface="Arial" pitchFamily="34" charset="-120"/>
+                        </a:rPr>
+                        <a:t>Hotelzimmer</a:t>
+                      </a:r>
+                      <a:endParaRPr lang="en-US" sz="1250" dirty="0">
+                        <a:latin typeface="Arial" charset="0"/>
+                        <a:ea typeface="Arial" charset="0"/>
+                        <a:cs typeface="Arial" charset="0"/>
+                      </a:endParaRPr>
+                    </a:p>
+                  </a:txBody>
+                  <a:tcPr marL="91440" marR="91440" marT="45720" marB="45720">
+                    <a:lnL w="12700" cap="flat" cmpd="sng" algn="ctr">
+                      <a:solidFill>
+                        <a:srgbClr val="FFFFFF"/>
+                      </a:solidFill>
+                      <a:prstDash val="solid"/>
+                      <a:round/>
+                      <a:headEnd type="none" w="med" len="med"/>
+                      <a:tailEnd type="none" w="med" len="med"/>
+                    </a:lnL>
+                    <a:lnR w="12700" cap="flat" cmpd="sng" algn="ctr">
+                      <a:solidFill>
+                        <a:srgbClr val="FFFFFF"/>
+                      </a:solidFill>
+                      <a:prstDash val="solid"/>
+                      <a:round/>
+                      <a:headEnd type="none" w="med" len="med"/>
+                      <a:tailEnd type="none" w="med" len="med"/>
+                    </a:lnR>
+                    <a:lnT w="12700" cap="flat" cmpd="sng" algn="ctr">
+                      <a:solidFill>
+                        <a:srgbClr val="FFFFFF"/>
+                      </a:solidFill>
+                      <a:prstDash val="solid"/>
+                      <a:round/>
+                      <a:headEnd type="none" w="med" len="med"/>
+                      <a:tailEnd type="none" w="med" len="med"/>
+                    </a:lnT>
+                    <a:lnB w="12700" cap="flat" cmpd="sng" algn="ctr">
+                      <a:solidFill>
+                        <a:srgbClr val="FFFFFF"/>
+                      </a:solidFill>
+                      <a:prstDash val="solid"/>
+                      <a:round/>
+                      <a:headEnd type="none" w="med" len="med"/>
+                      <a:tailEnd type="none" w="med" len="med"/>
+                    </a:lnB>
+                  </a:tcPr>
+                </a:tc>
+                <a:tc>
+                  <a:txBody>
+                    <a:bodyPr/>
+                    <a:lstStyle/>
+                    <a:p>
+                      <a:pPr algn="r" indent="0" marL="0">
+                        <a:buNone/>
+                      </a:pPr>
+                      <a:r>
+                        <a:rPr lang="en-US" sz="1250" dirty="0">
+                          <a:solidFill>
+                            <a:srgbClr val="000000"/>
+                          </a:solidFill>
+                          <a:latin typeface="Arial" pitchFamily="34" charset="0"/>
+                          <a:ea typeface="Arial" pitchFamily="34" charset="-122"/>
+                          <a:cs typeface="Arial" pitchFamily="34" charset="-120"/>
+                        </a:rPr>
+                        <a:t>15</a:t>
+                      </a:r>
+                      <a:endParaRPr lang="en-US" sz="1250" dirty="0">
+                        <a:latin typeface="Arial" charset="0"/>
+                        <a:ea typeface="Arial" charset="0"/>
+                        <a:cs typeface="Arial" charset="0"/>
+                      </a:endParaRPr>
+                    </a:p>
+                  </a:txBody>
+                  <a:tcPr marL="91440" marR="91440" marT="45720" marB="45720">
+                    <a:lnL w="12700" cap="flat" cmpd="sng" algn="ctr">
+                      <a:solidFill>
+                        <a:srgbClr val="FFFFFF"/>
+                      </a:solidFill>
+                      <a:prstDash val="solid"/>
+                      <a:round/>
+                      <a:headEnd type="none" w="med" len="med"/>
+                      <a:tailEnd type="none" w="med" len="med"/>
+                    </a:lnL>
+                    <a:lnR w="12700" cap="flat" cmpd="sng" algn="ctr">
+                      <a:solidFill>
+                        <a:srgbClr val="FFFFFF"/>
+                      </a:solidFill>
+                      <a:prstDash val="solid"/>
+                      <a:round/>
+                      <a:headEnd type="none" w="med" len="med"/>
+                      <a:tailEnd type="none" w="med" len="med"/>
+                    </a:lnR>
+                    <a:lnT w="12700" cap="flat" cmpd="sng" algn="ctr">
+                      <a:solidFill>
+                        <a:srgbClr val="FFFFFF"/>
+                      </a:solidFill>
+                      <a:prstDash val="solid"/>
+                      <a:round/>
+                      <a:headEnd type="none" w="med" len="med"/>
+                      <a:tailEnd type="none" w="med" len="med"/>
+                    </a:lnT>
+                    <a:lnB w="12700" cap="flat" cmpd="sng" algn="ctr">
+                      <a:solidFill>
+                        <a:srgbClr val="FFFFFF"/>
+                      </a:solidFill>
+                      <a:prstDash val="solid"/>
+                      <a:round/>
+                      <a:headEnd type="none" w="med" len="med"/>
+                      <a:tailEnd type="none" w="med" len="med"/>
+                    </a:lnB>
+                  </a:tcPr>
+                </a:tc>
+                <a:tc>
+                  <a:txBody>
+                    <a:bodyPr/>
+                    <a:lstStyle/>
+                    <a:p>
+                      <a:pPr algn="r" indent="0" marL="0">
+                        <a:buNone/>
+                      </a:pPr>
+                      <a:r>
+                        <a:rPr lang="en-US" sz="1250" dirty="0">
+                          <a:solidFill>
+                            <a:srgbClr val="000000"/>
+                          </a:solidFill>
+                          <a:latin typeface="Arial" pitchFamily="34" charset="0"/>
+                          <a:ea typeface="Arial" pitchFamily="34" charset="-122"/>
+                          <a:cs typeface="Arial" pitchFamily="34" charset="-120"/>
+                        </a:rPr>
+                        <a:t>122.944 €</a:t>
+                      </a:r>
+                      <a:endParaRPr lang="en-US" sz="1250" dirty="0">
+                        <a:latin typeface="Arial" charset="0"/>
+                        <a:ea typeface="Arial" charset="0"/>
+                        <a:cs typeface="Arial" charset="0"/>
+                      </a:endParaRPr>
+                    </a:p>
+                  </a:txBody>
+                  <a:tcPr marL="91440" marR="91440" marT="45720" marB="45720">
+                    <a:lnL w="12700" cap="flat" cmpd="sng" algn="ctr">
+                      <a:solidFill>
+                        <a:srgbClr val="FFFFFF"/>
+                      </a:solidFill>
+                      <a:prstDash val="solid"/>
+                      <a:round/>
+                      <a:headEnd type="none" w="med" len="med"/>
+                      <a:tailEnd type="none" w="med" len="med"/>
+                    </a:lnL>
+                    <a:lnR w="12700" cap="flat" cmpd="sng" algn="ctr">
+                      <a:solidFill>
+                        <a:srgbClr val="FFFFFF"/>
+                      </a:solidFill>
+                      <a:prstDash val="solid"/>
+                      <a:round/>
+                      <a:headEnd type="none" w="med" len="med"/>
+                      <a:tailEnd type="none" w="med" len="med"/>
+                    </a:lnR>
+                    <a:lnT w="12700" cap="flat" cmpd="sng" algn="ctr">
+                      <a:solidFill>
+                        <a:srgbClr val="FFFFFF"/>
+                      </a:solidFill>
+                      <a:prstDash val="solid"/>
+                      <a:round/>
+                      <a:headEnd type="none" w="med" len="med"/>
+                      <a:tailEnd type="none" w="med" len="med"/>
+                    </a:lnT>
+                    <a:lnB w="12700" cap="flat" cmpd="sng" algn="ctr">
+                      <a:solidFill>
+                        <a:srgbClr val="FFFFFF"/>
+                      </a:solidFill>
+                      <a:prstDash val="solid"/>
+                      <a:round/>
+                      <a:headEnd type="none" w="med" len="med"/>
+                      <a:tailEnd type="none" w="med" len="med"/>
+                    </a:lnB>
+                  </a:tcPr>
+                </a:tc>
+                <a:tc>
+                  <a:txBody>
+                    <a:bodyPr/>
+                    <a:lstStyle/>
+                    <a:p>
+                      <a:pPr algn="r" indent="0" marL="0">
+                        <a:buNone/>
+                      </a:pPr>
+                      <a:r>
+                        <a:rPr lang="en-US" sz="1250" dirty="0">
+                          <a:solidFill>
+                            <a:srgbClr val="000000"/>
+                          </a:solidFill>
+                          <a:latin typeface="Arial" pitchFamily="34" charset="0"/>
+                          <a:ea typeface="Arial" pitchFamily="34" charset="-122"/>
+                          <a:cs typeface="Arial" pitchFamily="34" charset="-120"/>
+                        </a:rPr>
+                        <a:t>468 €</a:t>
+                      </a:r>
+                      <a:endParaRPr lang="en-US" sz="1250" dirty="0">
+                        <a:latin typeface="Arial" charset="0"/>
+                        <a:ea typeface="Arial" charset="0"/>
+                        <a:cs typeface="Arial" charset="0"/>
+                      </a:endParaRPr>
+                    </a:p>
+                  </a:txBody>
+                  <a:tcPr marL="91440" marR="91440" marT="45720" marB="45720">
+                    <a:lnL w="12700" cap="flat" cmpd="sng" algn="ctr">
+                      <a:solidFill>
+                        <a:srgbClr val="FFFFFF"/>
+                      </a:solidFill>
+                      <a:prstDash val="solid"/>
+                      <a:round/>
+                      <a:headEnd type="none" w="med" len="med"/>
+                      <a:tailEnd type="none" w="med" len="med"/>
+                    </a:lnL>
+                    <a:lnR w="12700" cap="flat" cmpd="sng" algn="ctr">
+                      <a:solidFill>
+                        <a:srgbClr val="FFFFFF"/>
+                      </a:solidFill>
+                      <a:prstDash val="solid"/>
+                      <a:round/>
+                      <a:headEnd type="none" w="med" len="med"/>
+                      <a:tailEnd type="none" w="med" len="med"/>
+                    </a:lnR>
+                    <a:lnT w="12700" cap="flat" cmpd="sng" algn="ctr">
+                      <a:solidFill>
+                        <a:srgbClr val="FFFFFF"/>
+                      </a:solidFill>
+                      <a:prstDash val="solid"/>
+                      <a:round/>
+                      <a:headEnd type="none" w="med" len="med"/>
+                      <a:tailEnd type="none" w="med" len="med"/>
+                    </a:lnT>
+                    <a:lnB w="12700" cap="flat" cmpd="sng" algn="ctr">
+                      <a:solidFill>
+                        <a:srgbClr val="FFFFFF"/>
+                      </a:solidFill>
+                      <a:prstDash val="solid"/>
+                      <a:round/>
+                      <a:headEnd type="none" w="med" len="med"/>
+                      <a:tailEnd type="none" w="med" len="med"/>
+                    </a:lnB>
+                  </a:tcPr>
+                </a:tc>
+                <a:tc>
+                  <a:txBody>
+                    <a:bodyPr/>
+                    <a:lstStyle/>
+                    <a:p>
+                      <a:pPr algn="r" indent="0" marL="0">
+                        <a:buNone/>
+                      </a:pPr>
+                      <a:r>
+                        <a:rPr lang="en-US" sz="1250" dirty="0">
+                          <a:solidFill>
+                            <a:srgbClr val="000000"/>
+                          </a:solidFill>
+                          <a:latin typeface="Arial" pitchFamily="34" charset="0"/>
+                          <a:ea typeface="Arial" pitchFamily="34" charset="-122"/>
+                          <a:cs typeface="Arial" pitchFamily="34" charset="-120"/>
+                        </a:rPr>
+                        <a:t>266 €</a:t>
+                      </a:r>
+                      <a:endParaRPr lang="en-US" sz="1250" dirty="0">
+                        <a:latin typeface="Arial" charset="0"/>
+                        <a:ea typeface="Arial" charset="0"/>
+                        <a:cs typeface="Arial" charset="0"/>
+                      </a:endParaRPr>
+                    </a:p>
+                  </a:txBody>
+                  <a:tcPr marL="91440" marR="91440" marT="45720" marB="45720">
+                    <a:lnL w="12700" cap="flat" cmpd="sng" algn="ctr">
+                      <a:solidFill>
+                        <a:srgbClr val="FFFFFF"/>
+                      </a:solidFill>
+                      <a:prstDash val="solid"/>
+                      <a:round/>
+                      <a:headEnd type="none" w="med" len="med"/>
+                      <a:tailEnd type="none" w="med" len="med"/>
+                    </a:lnL>
+                    <a:lnR w="12700" cap="flat" cmpd="sng" algn="ctr">
+                      <a:solidFill>
+                        <a:srgbClr val="FFFFFF"/>
+                      </a:solidFill>
+                      <a:prstDash val="solid"/>
+                      <a:round/>
+                      <a:headEnd type="none" w="med" len="med"/>
+                      <a:tailEnd type="none" w="med" len="med"/>
+                    </a:lnR>
+                    <a:lnT w="12700" cap="flat" cmpd="sng" algn="ctr">
+                      <a:solidFill>
+                        <a:srgbClr val="FFFFFF"/>
+                      </a:solidFill>
+                      <a:prstDash val="solid"/>
+                      <a:round/>
+                      <a:headEnd type="none" w="med" len="med"/>
+                      <a:tailEnd type="none" w="med" len="med"/>
+                    </a:lnT>
+                    <a:lnB w="12700" cap="flat" cmpd="sng" algn="ctr">
+                      <a:solidFill>
+                        <a:srgbClr val="FFFFFF"/>
+                      </a:solidFill>
+                      <a:prstDash val="solid"/>
+                      <a:round/>
+                      <a:headEnd type="none" w="med" len="med"/>
+                      <a:tailEnd type="none" w="med" len="med"/>
+                    </a:lnB>
+                  </a:tcPr>
+                </a:tc>
+                <a:tc>
+                  <a:txBody>
+                    <a:bodyPr/>
+                    <a:lstStyle/>
+                    <a:p>
+                      <a:pPr algn="r" indent="0" marL="0">
+                        <a:buNone/>
+                      </a:pPr>
+                      <a:r>
+                        <a:rPr lang="en-US" sz="1250" b="1" dirty="0">
+                          <a:solidFill>
+                            <a:schemeClr val="accent6"/>
+                          </a:solidFill>
+                          <a:latin typeface="Arial" pitchFamily="34" charset="0"/>
+                          <a:ea typeface="Arial" pitchFamily="34" charset="-122"/>
+                          <a:cs typeface="Arial" pitchFamily="34" charset="-120"/>
+                        </a:rPr>
+                        <a:t>−202 €</a:t>
+                      </a:r>
+                      <a:endParaRPr lang="en-US" sz="1250" dirty="0">
+                        <a:latin typeface="Arial" charset="0"/>
+                        <a:ea typeface="Arial" charset="0"/>
+                        <a:cs typeface="Arial" charset="0"/>
+                      </a:endParaRPr>
+                    </a:p>
+                  </a:txBody>
+                  <a:tcPr marL="91440" marR="91440" marT="45720" marB="45720">
+                    <a:lnL w="12700" cap="flat" cmpd="sng" algn="ctr">
+                      <a:solidFill>
+                        <a:srgbClr val="FFFFFF"/>
+                      </a:solidFill>
+                      <a:prstDash val="solid"/>
+                      <a:round/>
+                      <a:headEnd type="none" w="med" len="med"/>
+                      <a:tailEnd type="none" w="med" len="med"/>
+                    </a:lnL>
+                    <a:lnR w="12700" cap="flat" cmpd="sng" algn="ctr">
+                      <a:solidFill>
+                        <a:srgbClr val="FFFFFF"/>
+                      </a:solidFill>
+                      <a:prstDash val="solid"/>
+                      <a:round/>
+                      <a:headEnd type="none" w="med" len="med"/>
+                      <a:tailEnd type="none" w="med" len="med"/>
+                    </a:lnR>
+                    <a:lnT w="12700" cap="flat" cmpd="sng" algn="ctr">
+                      <a:solidFill>
+                        <a:srgbClr val="FFFFFF"/>
+                      </a:solidFill>
+                      <a:prstDash val="solid"/>
+                      <a:round/>
+                      <a:headEnd type="none" w="med" len="med"/>
+                      <a:tailEnd type="none" w="med" len="med"/>
+                    </a:lnT>
+                    <a:lnB w="12700" cap="flat" cmpd="sng" algn="ctr">
+                      <a:solidFill>
+                        <a:srgbClr val="FFFFFF"/>
+                      </a:solidFill>
+                      <a:prstDash val="solid"/>
+                      <a:round/>
+                      <a:headEnd type="none" w="med" len="med"/>
+                      <a:tailEnd type="none" w="med" len="med"/>
+                    </a:lnB>
+                    <a:solidFill>
+                      <a:srgbClr val="F8E4E2"/>
+                    </a:solidFill>
+                  </a:tcPr>
+                </a:tc>
+                <a:tc>
+                  <a:txBody>
+                    <a:bodyPr/>
+                    <a:lstStyle/>
+                    <a:p>
+                      <a:pPr algn="r" indent="0" marL="0">
+                        <a:buNone/>
+                      </a:pPr>
+                      <a:r>
+                        <a:rPr lang="en-US" sz="1250" dirty="0">
+                          <a:solidFill>
+                            <a:srgbClr val="000000"/>
+                          </a:solidFill>
+                          <a:latin typeface="Arial" pitchFamily="34" charset="0"/>
+                          <a:ea typeface="Arial" pitchFamily="34" charset="-122"/>
+                          <a:cs typeface="Arial" pitchFamily="34" charset="-120"/>
+                        </a:rPr>
+                        <a:t>5.541 €</a:t>
+                      </a:r>
+                      <a:endParaRPr lang="en-US" sz="1250" dirty="0">
+                        <a:latin typeface="Arial" charset="0"/>
+                        <a:ea typeface="Arial" charset="0"/>
+                        <a:cs typeface="Arial" charset="0"/>
+                      </a:endParaRPr>
+                    </a:p>
+                  </a:txBody>
+                  <a:tcPr marL="91440" marR="91440" marT="45720" marB="45720">
+                    <a:lnL w="12700" cap="flat" cmpd="sng" algn="ctr">
+                      <a:solidFill>
+                        <a:srgbClr val="FFFFFF"/>
+                      </a:solidFill>
+                      <a:prstDash val="solid"/>
+                      <a:round/>
+                      <a:headEnd type="none" w="med" len="med"/>
+                      <a:tailEnd type="none" w="med" len="med"/>
+                    </a:lnL>
+                    <a:lnR w="12700" cap="flat" cmpd="sng" algn="ctr">
+                      <a:solidFill>
+                        <a:srgbClr val="FFFFFF"/>
+                      </a:solidFill>
+                      <a:prstDash val="solid"/>
+                      <a:round/>
+                      <a:headEnd type="none" w="med" len="med"/>
+                      <a:tailEnd type="none" w="med" len="med"/>
+                    </a:lnR>
+                    <a:lnT w="12700" cap="flat" cmpd="sng" algn="ctr">
+                      <a:solidFill>
+                        <a:srgbClr val="FFFFFF"/>
+                      </a:solidFill>
+                      <a:prstDash val="solid"/>
+                      <a:round/>
+                      <a:headEnd type="none" w="med" len="med"/>
+                      <a:tailEnd type="none" w="med" len="med"/>
+                    </a:lnT>
+                    <a:lnB w="12700" cap="flat" cmpd="sng" algn="ctr">
+                      <a:solidFill>
+                        <a:srgbClr val="FFFFFF"/>
+                      </a:solidFill>
+                      <a:prstDash val="solid"/>
+                      <a:round/>
+                      <a:headEnd type="none" w="med" len="med"/>
+                      <a:tailEnd type="none" w="med" len="med"/>
+                    </a:lnB>
+                  </a:tcPr>
+                </a:tc>
+                <a:tc>
+                  <a:txBody>
+                    <a:bodyPr/>
+                    <a:lstStyle/>
+                    <a:p>
+                      <a:pPr algn="r" indent="0" marL="0">
+                        <a:buNone/>
+                      </a:pPr>
+                      <a:r>
+                        <a:rPr lang="en-US" sz="1250" dirty="0">
+                          <a:solidFill>
+                            <a:srgbClr val="000000"/>
+                          </a:solidFill>
+                          <a:latin typeface="Arial" pitchFamily="34" charset="0"/>
+                          <a:ea typeface="Arial" pitchFamily="34" charset="-122"/>
+                          <a:cs typeface="Arial" pitchFamily="34" charset="-120"/>
+                        </a:rPr>
+                        <a:t>117.403 €</a:t>
+                      </a:r>
+                      <a:endParaRPr lang="en-US" sz="1250" dirty="0">
+                        <a:latin typeface="Arial" charset="0"/>
+                        <a:ea typeface="Arial" charset="0"/>
+                        <a:cs typeface="Arial" charset="0"/>
+                      </a:endParaRPr>
+                    </a:p>
+                  </a:txBody>
+                  <a:tcPr marL="91440" marR="91440" marT="45720" marB="45720">
+                    <a:lnL w="12700" cap="flat" cmpd="sng" algn="ctr">
+                      <a:solidFill>
+                        <a:srgbClr val="FFFFFF"/>
+                      </a:solidFill>
+                      <a:prstDash val="solid"/>
+                      <a:round/>
+                      <a:headEnd type="none" w="med" len="med"/>
+                      <a:tailEnd type="none" w="med" len="med"/>
+                    </a:lnL>
+                    <a:lnR w="12700" cap="flat" cmpd="sng" algn="ctr">
+                      <a:solidFill>
+                        <a:srgbClr val="FFFFFF"/>
+                      </a:solidFill>
+                      <a:prstDash val="solid"/>
+                      <a:round/>
+                      <a:headEnd type="none" w="med" len="med"/>
+                      <a:tailEnd type="none" w="med" len="med"/>
+                    </a:lnR>
+                    <a:lnT w="12700" cap="flat" cmpd="sng" algn="ctr">
+                      <a:solidFill>
+                        <a:srgbClr val="FFFFFF"/>
+                      </a:solidFill>
+                      <a:prstDash val="solid"/>
+                      <a:round/>
+                      <a:headEnd type="none" w="med" len="med"/>
+                      <a:tailEnd type="none" w="med" len="med"/>
+                    </a:lnT>
+                    <a:lnB w="12700" cap="flat" cmpd="sng" algn="ctr">
+                      <a:solidFill>
+                        <a:srgbClr val="FFFFFF"/>
+                      </a:solidFill>
+                      <a:prstDash val="solid"/>
+                      <a:round/>
+                      <a:headEnd type="none" w="med" len="med"/>
+                      <a:tailEnd type="none" w="med" len="med"/>
+                    </a:lnB>
+                  </a:tcPr>
+                </a:tc>
+              </a:tr>
+            </a:tbl>
+          </a:graphicData>
+        </a:graphic>
+      </p:graphicFrame>
+      <p:sp>
+        <p:nvSpPr>
+          <p:cNvPr id="6" name="Text 2"/>
+          <p:cNvSpPr txBox="1"/>
+          <p:nvPr/>
+        </p:nvSpPr>
+        <p:spPr>
+          <a:xfrm>
+            <a:off x="548640" y="4023360"/>
+            <a:ext cx="11091672" cy="1645920"/>
+          </a:xfrm>
+          <a:prstGeom prst="rect">
+            <a:avLst/>
+          </a:prstGeom>
+          <a:noFill/>
+          <a:ln/>
+        </p:spPr>
+        <p:txBody>
+          <a:bodyPr wrap="square" lIns="0" tIns="0" rIns="0" bIns="0" rtlCol="0" anchor="t"/>
+          <a:lstStyle/>
+          <a:p>
+            <a:pPr indent="0" marL="0">
+              <a:spcAft>
+                <a:spcPts val="800"/>
+              </a:spcAft>
+              <a:buNone/>
+            </a:pPr>
+            <a:r>
+              <a:rPr lang="en-US" sz="1400" dirty="0">
+                <a:solidFill>
+                  <a:schemeClr val="tx1"/>
+                </a:solidFill>
+                <a:latin typeface="Arial" pitchFamily="34" charset="0"/>
+                <a:ea typeface="Arial" pitchFamily="34" charset="-122"/>
+                <a:cs typeface="Arial" pitchFamily="34" charset="-120"/>
+              </a:rPr>
+              <a:t>Bei Selbstkostenpreis ist jede Einheit im Minus. Für ein Plus von 250 € müsste der Preis so tief sinken, dass du insgesamt 1.761.049 € Differenz trägst.</a:t>
+            </a:r>
+            <a:endParaRPr lang="en-US" sz="1400" dirty="0"/>
+          </a:p>
+          <a:p>
+            <a:pPr indent="0" marL="0">
+              <a:spcAft>
+                <a:spcPts val="800"/>
+              </a:spcAft>
+              <a:buNone/>
+            </a:pPr>
+            <a:r>
+              <a:rPr lang="en-US" sz="1400" dirty="0">
+                <a:solidFill>
+                  <a:schemeClr val="tx1"/>
+                </a:solidFill>
+                <a:latin typeface="Arial" pitchFamily="34" charset="0"/>
+                <a:ea typeface="Arial" pitchFamily="34" charset="-122"/>
+                <a:cs typeface="Arial" pitchFamily="34" charset="-120"/>
+              </a:rPr>
+              <a:t>Dein Ergebnis dann: Gastro 15.250 € minus Rate EG 4.176 € minus Zinsen auf die Differenz 5.147 € = +5.926 € pro Monat. Eine Bank finanziert eine so hohe Differenz kaum.</a:t>
+            </a:r>
+            <a:endParaRPr lang="en-US" sz="1400" dirty="0"/>
+          </a:p>
+        </p:txBody>
+      </p:sp>
+      <p:sp>
+        <p:nvSpPr>
+          <p:cNvPr id="25" name="Slide Number Placeholder 0"/>
+          <p:cNvSpPr>
+            <a:spLocks noGrp="1"/>
+          </p:cNvSpPr>
+          <p:nvPr>
+            <p:ph type="sldNum" sz="quarter" idx="4294967295"/>
+          </p:nvPr>
+        </p:nvSpPr>
+        <p:spPr>
+          <a:xfrm>
+            <a:off x="11183112" y="6446520"/>
+            <a:ext cx="548640" cy="274320"/>
+          </a:xfrm>
+          <a:prstGeom prst="rect">
+            <a:avLst/>
+          </a:prstGeom>
+          <a:extLst>
+            <a:ext uri="{C572A759-6A51-4108-AA02-DFA0A04FC94B}">
+              <ma14:wrappingTextBoxFlag xmlns:ma14="http://schemas.microsoft.com/office/mac/drawingml/2011/main" val="0"/>
+            </a:ext>
+          </a:extLst>
+        </p:spPr>
+        <p:txBody>
+          <a:bodyPr/>
+          <a:lstStyle>
+            <a:lvl1pPr>
+              <a:defRPr sz="1000">
+                <a:solidFill>
+                  <a:schemeClr val="accent4"/>
+                </a:solidFill>
+              </a:defRPr>
+            </a:lvl1pPr>
+          </a:lstStyle>
+          <a:p>
+            <a:pPr algn="r"/>
+            <a:fld id="{F7021451-1387-4CA6-816F-3879F97B5CBC}" type="slidenum">
+              <a:rPr b="0" lang="en-US"/>
+              <a:t>7</a:t>
+            </a:fld>
+            <a:endParaRPr lang="en-US"/>
+          </a:p>
+        </p:txBody>
+      </p:sp>
+    </p:spTree>
+  </p:cSld>
+  <p:clrMapOvr>
+    <a:masterClrMapping/>
+  </p:clrMapOvr>
+</p:sld>
+</file>
+
+<file path=ppt/slides/slide8.xml><?xml version="1.0" encoding="utf-8"?>
+<p:sld xmlns:a="http://schemas.openxmlformats.org/drawingml/2006/main" xmlns:r="http://schemas.openxmlformats.org/officeDocument/2006/relationships" xmlns:p="http://schemas.openxmlformats.org/presentationml/2006/main">
+  <p:cSld name="Slide 8">
+    <p:spTree>
+      <p:nvGrpSpPr>
+        <p:cNvPr id="1" name=""/>
+        <p:cNvGrpSpPr/>
+        <p:nvPr/>
+      </p:nvGrpSpPr>
+      <p:grpSpPr>
+        <a:xfrm>
+          <a:off x="0" y="0"/>
+          <a:ext cx="0" cy="0"/>
+          <a:chOff x="0" y="0"/>
+          <a:chExt cx="0" cy="0"/>
+        </a:xfrm>
+      </p:grpSpPr>
+      <p:sp>
+        <p:nvSpPr>
+          <p:cNvPr id="2" name="Text 1"/>
+          <p:cNvSpPr/>
+          <p:nvPr>
+            <p:ph idx="101" type="title" hasCustomPrompt="1"/>
+          </p:nvPr>
+        </p:nvSpPr>
+        <p:spPr>
+          <a:xfrm>
+            <a:off x="548640" y="320040"/>
+            <a:ext cx="11091672" cy="822960"/>
+          </a:xfrm>
+          <a:prstGeom prst="rect">
+            <a:avLst/>
+          </a:prstGeom>
+          <a:noFill/>
+          <a:ln/>
+        </p:spPr>
+        <p:txBody>
+          <a:bodyPr wrap="square" lIns="0" tIns="0" rIns="0" bIns="0" rtlCol="0" anchor="ctr"/>
+          <a:lstStyle/>
+          <a:p>
+            <a:pPr algn="l" indent="0" marL="0">
+              <a:buNone/>
+            </a:pPr>
+            <a:r>
+              <a:rPr lang="en-US" sz="2700" dirty="0">
+                <a:solidFill>
+                  <a:schemeClr val="accent1"/>
+                </a:solidFill>
+                <a:latin typeface="Georgia" pitchFamily="34" charset="0"/>
+                <a:ea typeface="Georgia" pitchFamily="34" charset="-122"/>
+                <a:cs typeface="Georgia" pitchFamily="34" charset="-120"/>
+              </a:rPr>
               <a:t>Recht und Risiken</a:t>
             </a:r>
             <a:endParaRPr lang="en-US" sz="2700" dirty="0"/>
@@ -10655,7 +12060,7 @@
             <a:pPr algn="r"/>
             <a:fld id="{F7021451-1387-4CA6-816F-3879F97B5CBC}" type="slidenum">
               <a:rPr b="0" lang="en-US"/>
-              <a:t>7</a:t>
+              <a:t>8</a:t>
             </a:fld>
             <a:endParaRPr lang="en-US"/>
           </a:p>
@@ -10669,9 +12074,9 @@
 </p:sld>
 </file>
 
-<file path=ppt/slides/slide8.xml><?xml version="1.0" encoding="utf-8"?>
+<file path=ppt/slides/slide9.xml><?xml version="1.0" encoding="utf-8"?>
 <p:sld xmlns:a="http://schemas.openxmlformats.org/drawingml/2006/main" xmlns:r="http://schemas.openxmlformats.org/officeDocument/2006/relationships" xmlns:p="http://schemas.openxmlformats.org/presentationml/2006/main">
-  <p:cSld name="Slide 8">
+  <p:cSld name="Slide 9">
     <p:spTree>
       <p:nvGrpSpPr>
         <p:cNvPr id="1" name=""/>
@@ -10967,7 +12372,7 @@
             <a:pPr algn="r"/>
             <a:fld id="{F7021451-1387-4CA6-816F-3879F97B5CBC}" type="slidenum">
               <a:rPr b="0" lang="en-US"/>
-              <a:t>8</a:t>
+              <a:t>9</a:t>
             </a:fld>
             <a:endParaRPr lang="en-US"/>
           </a:p>

--- a/praesentation/Neue-Mitte-Werlte_Baufeld3_Hotel-und-Gastro.pptx
+++ b/praesentation/Neue-Mitte-Werlte_Baufeld3_Hotel-und-Gastro.pptx
@@ -598,7 +598,7 @@
           <a:p>
             <a:r>
               <a:rPr lang="en-US" dirty="0"/>
-              <a:t>Variante A: 930 m² BGF, EG Gastro 290 m² mit Frühstück, 1. OG und Staffel (Holzbau) als Hotel mit 15 Zimmern.</a:t>
+              <a:t>Variante A: 960 m² BGF, EG Gastro 290 m² mit Frühstück, 1. OG und Staffel (Holzbau) als Hotel mit 15 Zimmern.</a:t>
             </a:r>
             <a:endParaRPr lang="en-US" dirty="0"/>
           </a:p>
@@ -774,7 +774,7 @@
           <a:p>
             <a:r>
               <a:rPr lang="en-US" dirty="0"/>
-              <a:t>Ergebnis des ganzen Hauses pro Monat: Gastro (ohne Lohn) plus Hotel minus Rate (11.199 €). Ein Kredit, 3,3 % Zins, 1 % Tilgung.</a:t>
+              <a:t>Ergebnis des ganzen Hauses pro Monat: Gastro (ohne Lohn) plus Hotel minus Rate (11.372 €). Ein Kredit, 3,3 % Zins, 1 % Tilgung.</a:t>
             </a:r>
             <a:endParaRPr lang="en-US" dirty="0"/>
           </a:p>
@@ -2389,7 +2389,7 @@
                 <a:ea typeface="Georgia" pitchFamily="34" charset="-122"/>
                 <a:cs typeface="Georgia" pitchFamily="34" charset="-120"/>
               </a:rPr>
-              <a:t>+9.350 €</a:t>
+              <a:t>+9.177 €</a:t>
             </a:r>
             <a:endParaRPr lang="en-US" sz="2800" dirty="0"/>
           </a:p>
@@ -2494,7 +2494,7 @@
                 <a:ea typeface="Georgia" pitchFamily="34" charset="-122"/>
                 <a:cs typeface="Georgia" pitchFamily="34" charset="-120"/>
               </a:rPr>
-              <a:t>+9.860 €</a:t>
+              <a:t>+9.687 €</a:t>
             </a:r>
             <a:endParaRPr lang="en-US" sz="2800" dirty="0"/>
           </a:p>
@@ -5038,7 +5038,7 @@
                           <a:ea typeface="Arial" pitchFamily="34" charset="-122"/>
                           <a:cs typeface="Arial" pitchFamily="34" charset="-120"/>
                         </a:rPr>
-                        <a:t>+8.047 €</a:t>
+                        <a:t>+7.873 €</a:t>
                       </a:r>
                       <a:endParaRPr lang="en-US" sz="1250" dirty="0">
                         <a:latin typeface="Arial" charset="0"/>
@@ -5171,7 +5171,7 @@
                           <a:ea typeface="Arial" pitchFamily="34" charset="-122"/>
                           <a:cs typeface="Arial" pitchFamily="34" charset="-120"/>
                         </a:rPr>
-                        <a:t>+6.775 €</a:t>
+                        <a:t>+6.601 €</a:t>
                       </a:r>
                       <a:endParaRPr lang="en-US" sz="1250" dirty="0">
                         <a:latin typeface="Arial" charset="0"/>
@@ -5436,7 +5436,7 @@
                           <a:ea typeface="Arial" pitchFamily="34" charset="-122"/>
                           <a:cs typeface="Arial" pitchFamily="34" charset="-120"/>
                         </a:rPr>
-                        <a:t>+9.133 €</a:t>
+                        <a:t>+8.959 €</a:t>
                       </a:r>
                       <a:endParaRPr lang="en-US" sz="1250" dirty="0">
                         <a:latin typeface="Arial" charset="0"/>
@@ -5569,7 +5569,7 @@
                           <a:ea typeface="Arial" pitchFamily="34" charset="-122"/>
                           <a:cs typeface="Arial" pitchFamily="34" charset="-120"/>
                         </a:rPr>
-                        <a:t>+7.543 €</a:t>
+                        <a:t>+7.369 €</a:t>
                       </a:r>
                       <a:endParaRPr lang="en-US" sz="1250" dirty="0">
                         <a:latin typeface="Arial" charset="0"/>
@@ -5834,7 +5834,7 @@
                           <a:ea typeface="Arial" pitchFamily="34" charset="-122"/>
                           <a:cs typeface="Arial" pitchFamily="34" charset="-120"/>
                         </a:rPr>
-                        <a:t>+10.218 €</a:t>
+                        <a:t>+10.045 €</a:t>
                       </a:r>
                       <a:endParaRPr lang="en-US" sz="1250" dirty="0">
                         <a:latin typeface="Arial" charset="0"/>
@@ -5967,7 +5967,7 @@
                           <a:ea typeface="Arial" pitchFamily="34" charset="-122"/>
                           <a:cs typeface="Arial" pitchFamily="34" charset="-120"/>
                         </a:rPr>
-                        <a:t>+8.310 €</a:t>
+                        <a:t>+8.137 €</a:t>
                       </a:r>
                       <a:endParaRPr lang="en-US" sz="1250" dirty="0">
                         <a:latin typeface="Arial" charset="0"/>
@@ -6232,7 +6232,7 @@
                           <a:ea typeface="Arial" pitchFamily="34" charset="-122"/>
                           <a:cs typeface="Arial" pitchFamily="34" charset="-120"/>
                         </a:rPr>
-                        <a:t>+11.304 €</a:t>
+                        <a:t>+11.131 €</a:t>
                       </a:r>
                       <a:endParaRPr lang="en-US" sz="1250" dirty="0">
                         <a:latin typeface="Arial" charset="0"/>
@@ -6365,7 +6365,7 @@
                           <a:ea typeface="Arial" pitchFamily="34" charset="-122"/>
                           <a:cs typeface="Arial" pitchFamily="34" charset="-120"/>
                         </a:rPr>
-                        <a:t>+9.078 €</a:t>
+                        <a:t>+8.905 €</a:t>
                       </a:r>
                       <a:endParaRPr lang="en-US" sz="1250" dirty="0">
                         <a:latin typeface="Arial" charset="0"/>
@@ -6619,7 +6619,7 @@
                           <a:ea typeface="Arial" pitchFamily="34" charset="-122"/>
                           <a:cs typeface="Arial" pitchFamily="34" charset="-120"/>
                         </a:rPr>
-                        <a:t>+9.860 €</a:t>
+                        <a:t>+9.687 €</a:t>
                       </a:r>
                       <a:endParaRPr lang="en-US" sz="1250" dirty="0">
                         <a:latin typeface="Arial" charset="0"/>
@@ -7380,7 +7380,7 @@
                           <a:ea typeface="Arial" pitchFamily="34" charset="-122"/>
                           <a:cs typeface="Arial" pitchFamily="34" charset="-120"/>
                         </a:rPr>
-                        <a:t>+8.685 €</a:t>
+                        <a:t>+8.512 €</a:t>
                       </a:r>
                       <a:endParaRPr lang="en-US" sz="1250" dirty="0">
                         <a:latin typeface="Arial" charset="0"/>
@@ -7645,7 +7645,7 @@
                           <a:ea typeface="Arial" pitchFamily="34" charset="-122"/>
                           <a:cs typeface="Arial" pitchFamily="34" charset="-120"/>
                         </a:rPr>
-                        <a:t>+9.350 €</a:t>
+                        <a:t>+9.177 €</a:t>
                       </a:r>
                       <a:endParaRPr lang="en-US" sz="1250" dirty="0">
                         <a:latin typeface="Arial" charset="0"/>
@@ -7910,7 +7910,7 @@
                           <a:ea typeface="Arial" pitchFamily="34" charset="-122"/>
                           <a:cs typeface="Arial" pitchFamily="34" charset="-120"/>
                         </a:rPr>
-                        <a:t>+10.014 €</a:t>
+                        <a:t>+9.841 €</a:t>
                       </a:r>
                       <a:endParaRPr lang="en-US" sz="1250" dirty="0">
                         <a:latin typeface="Arial" charset="0"/>
@@ -8175,7 +8175,7 @@
                           <a:ea typeface="Arial" pitchFamily="34" charset="-122"/>
                           <a:cs typeface="Arial" pitchFamily="34" charset="-120"/>
                         </a:rPr>
-                        <a:t>+10.678 €</a:t>
+                        <a:t>+10.505 €</a:t>
                       </a:r>
                       <a:endParaRPr lang="en-US" sz="1250" dirty="0">
                         <a:latin typeface="Arial" charset="0"/>
@@ -8962,7 +8962,7 @@
                           <a:ea typeface="Arial" pitchFamily="34" charset="-122"/>
                           <a:cs typeface="Arial" pitchFamily="34" charset="-120"/>
                         </a:rPr>
-                        <a:t>10.172 €</a:t>
+                        <a:t>10.345 €</a:t>
                       </a:r>
                       <a:endParaRPr lang="en-US" sz="1250" dirty="0">
                         <a:latin typeface="Arial" charset="0"/>
@@ -9027,7 +9027,7 @@
                           <a:ea typeface="Arial" pitchFamily="34" charset="-122"/>
                           <a:cs typeface="Arial" pitchFamily="34" charset="-120"/>
                         </a:rPr>
-                        <a:t>+9.860 €</a:t>
+                        <a:t>+9.687 €</a:t>
                       </a:r>
                       <a:endParaRPr lang="en-US" sz="1250" dirty="0">
                         <a:latin typeface="Arial" charset="0"/>
@@ -9227,7 +9227,7 @@
                           <a:ea typeface="Arial" pitchFamily="34" charset="-122"/>
                           <a:cs typeface="Arial" pitchFamily="34" charset="-120"/>
                         </a:rPr>
-                        <a:t>253.800 €</a:t>
+                        <a:t>266.400 €</a:t>
                       </a:r>
                       <a:endParaRPr lang="en-US" sz="1250" dirty="0">
                         <a:latin typeface="Arial" charset="0"/>
@@ -9292,7 +9292,7 @@
                           <a:ea typeface="Arial" pitchFamily="34" charset="-122"/>
                           <a:cs typeface="Arial" pitchFamily="34" charset="-120"/>
                         </a:rPr>
-                        <a:t>11.137 €</a:t>
+                        <a:t>11.358 €</a:t>
                       </a:r>
                       <a:endParaRPr lang="en-US" sz="1250" dirty="0">
                         <a:latin typeface="Arial" charset="0"/>
@@ -9357,7 +9357,7 @@
                           <a:ea typeface="Arial" pitchFamily="34" charset="-122"/>
                           <a:cs typeface="Arial" pitchFamily="34" charset="-120"/>
                         </a:rPr>
-                        <a:t>+7.107 €</a:t>
+                        <a:t>+6.886 €</a:t>
                       </a:r>
                       <a:endParaRPr lang="en-US" sz="1250" dirty="0">
                         <a:latin typeface="Arial" charset="0"/>
@@ -9622,7 +9622,7 @@
                           <a:ea typeface="Arial" pitchFamily="34" charset="-122"/>
                           <a:cs typeface="Arial" pitchFamily="34" charset="-120"/>
                         </a:rPr>
-                        <a:t>11.199 €</a:t>
+                        <a:t>11.372 €</a:t>
                       </a:r>
                       <a:endParaRPr lang="en-US" sz="1250" dirty="0">
                         <a:latin typeface="Arial" charset="0"/>
@@ -9687,7 +9687,7 @@
                           <a:ea typeface="Arial" pitchFamily="34" charset="-122"/>
                           <a:cs typeface="Arial" pitchFamily="34" charset="-120"/>
                         </a:rPr>
-                        <a:t>+9.350 €</a:t>
+                        <a:t>+9.177 €</a:t>
                       </a:r>
                       <a:endParaRPr lang="en-US" sz="1250" dirty="0">
                         <a:latin typeface="Arial" charset="0"/>
@@ -9952,7 +9952,7 @@
                           <a:ea typeface="Arial" pitchFamily="34" charset="-122"/>
                           <a:cs typeface="Arial" pitchFamily="34" charset="-120"/>
                         </a:rPr>
-                        <a:t>11.199 €</a:t>
+                        <a:t>11.372 €</a:t>
                       </a:r>
                       <a:endParaRPr lang="en-US" sz="1250" dirty="0">
                         <a:latin typeface="Arial" charset="0"/>
@@ -10017,7 +10017,7 @@
                           <a:ea typeface="Arial" pitchFamily="34" charset="-122"/>
                           <a:cs typeface="Arial" pitchFamily="34" charset="-120"/>
                         </a:rPr>
-                        <a:t>+7.696 €</a:t>
+                        <a:t>+7.523 €</a:t>
                       </a:r>
                       <a:endParaRPr lang="en-US" sz="1250" dirty="0">
                         <a:latin typeface="Arial" charset="0"/>
@@ -11011,7 +11011,7 @@
                           <a:ea typeface="Arial" pitchFamily="34" charset="-122"/>
                           <a:cs typeface="Arial" pitchFamily="34" charset="-120"/>
                         </a:rPr>
-                        <a:t>122.944 €</a:t>
+                        <a:t>126.160 €</a:t>
                       </a:r>
                       <a:endParaRPr lang="en-US" sz="1250" dirty="0">
                         <a:latin typeface="Arial" charset="0"/>
@@ -11076,7 +11076,7 @@
                           <a:ea typeface="Arial" pitchFamily="34" charset="-122"/>
                           <a:cs typeface="Arial" pitchFamily="34" charset="-120"/>
                         </a:rPr>
-                        <a:t>468 €</a:t>
+                        <a:t>480 €</a:t>
                       </a:r>
                       <a:endParaRPr lang="en-US" sz="1250" dirty="0">
                         <a:latin typeface="Arial" charset="0"/>
@@ -11206,7 +11206,7 @@
                           <a:ea typeface="Arial" pitchFamily="34" charset="-122"/>
                           <a:cs typeface="Arial" pitchFamily="34" charset="-120"/>
                         </a:rPr>
-                        <a:t>−202 €</a:t>
+                        <a:t>−214 €</a:t>
                       </a:r>
                       <a:endParaRPr lang="en-US" sz="1250" dirty="0">
                         <a:latin typeface="Arial" charset="0"/>
@@ -11339,7 +11339,7 @@
                           <a:ea typeface="Arial" pitchFamily="34" charset="-122"/>
                           <a:cs typeface="Arial" pitchFamily="34" charset="-120"/>
                         </a:rPr>
-                        <a:t>117.403 €</a:t>
+                        <a:t>120.619 €</a:t>
                       </a:r>
                       <a:endParaRPr lang="en-US" sz="1250" dirty="0">
                         <a:latin typeface="Arial" charset="0"/>
@@ -11428,7 +11428,7 @@
                 <a:ea typeface="Arial" pitchFamily="34" charset="-122"/>
                 <a:cs typeface="Arial" pitchFamily="34" charset="-120"/>
               </a:rPr>
-              <a:t>Bei Selbstkostenpreis ist jede Einheit im Minus. Für ein Plus von 250 € müsste der Preis so tief sinken, dass du insgesamt 1.761.049 € Differenz trägst.</a:t>
+              <a:t>Bei Selbstkostenpreis ist jede Einheit im Minus. Für ein Plus von 250 € müsste der Preis so tief sinken, dass du insgesamt 1.809.287 € Differenz trägst.</a:t>
             </a:r>
             <a:endParaRPr lang="en-US" sz="1400" dirty="0"/>
           </a:p>
@@ -11448,7 +11448,7 @@
                 <a:ea typeface="Arial" pitchFamily="34" charset="-122"/>
                 <a:cs typeface="Arial" pitchFamily="34" charset="-120"/>
               </a:rPr>
-              <a:t>Dein Ergebnis dann: Gastro 15.250 € minus Rate EG 4.176 € minus Zinsen auf die Differenz 5.147 € = +5.926 € pro Monat. Eine Bank finanziert eine so hohe Differenz kaum.</a:t>
+              <a:t>Dein Ergebnis dann: Gastro 15.250 € minus Rate EG 4.166 € minus Zinsen auf die Differenz 5.288 € = +5.796 € pro Monat. Eine Bank finanziert eine so hohe Differenz kaum.</a:t>
             </a:r>
             <a:endParaRPr lang="en-US" sz="1400" dirty="0"/>
           </a:p>

--- a/praesentation/Neue-Mitte-Werlte_Baufeld3_Hotel-und-Gastro.pptx
+++ b/praesentation/Neue-Mitte-Werlte_Baufeld3_Hotel-und-Gastro.pptx
@@ -11274,7 +11274,7 @@
                           <a:ea typeface="Arial" pitchFamily="34" charset="-122"/>
                           <a:cs typeface="Arial" pitchFamily="34" charset="-120"/>
                         </a:rPr>
-                        <a:t>5.541 €</a:t>
+                        <a:t>5.543 €</a:t>
                       </a:r>
                       <a:endParaRPr lang="en-US" sz="1250" dirty="0">
                         <a:latin typeface="Arial" charset="0"/>
@@ -11339,7 +11339,7 @@
                           <a:ea typeface="Arial" pitchFamily="34" charset="-122"/>
                           <a:cs typeface="Arial" pitchFamily="34" charset="-120"/>
                         </a:rPr>
-                        <a:t>120.619 €</a:t>
+                        <a:t>120.617 €</a:t>
                       </a:r>
                       <a:endParaRPr lang="en-US" sz="1250" dirty="0">
                         <a:latin typeface="Arial" charset="0"/>
@@ -11428,7 +11428,7 @@
                 <a:ea typeface="Arial" pitchFamily="34" charset="-122"/>
                 <a:cs typeface="Arial" pitchFamily="34" charset="-120"/>
               </a:rPr>
-              <a:t>Bei Selbstkostenpreis ist jede Einheit im Minus. Für ein Plus von 250 € müsste der Preis so tief sinken, dass du insgesamt 1.809.287 € Differenz trägst.</a:t>
+              <a:t>Bei Selbstkostenpreis ist jede Einheit im Minus. Für ein Plus von 250 € müsste der Preis so tief sinken, dass du insgesamt 1.809.251 € Differenz trägst.</a:t>
             </a:r>
             <a:endParaRPr lang="en-US" sz="1400" dirty="0"/>
           </a:p>
@@ -11448,7 +11448,7 @@
                 <a:ea typeface="Arial" pitchFamily="34" charset="-122"/>
                 <a:cs typeface="Arial" pitchFamily="34" charset="-120"/>
               </a:rPr>
-              <a:t>Dein Ergebnis dann: Gastro 15.250 € minus Rate EG 4.166 € minus Zinsen auf die Differenz 5.288 € = +5.796 € pro Monat. Eine Bank finanziert eine so hohe Differenz kaum.</a:t>
+              <a:t>Dein Ergebnis dann: Gastro 15.250 € minus Rate EG 4.164 € minus Zinsen auf die Differenz 5.286 € = +5.800 € pro Monat. Eine Bank finanziert eine so hohe Differenz kaum.</a:t>
             </a:r>
             <a:endParaRPr lang="en-US" sz="1400" dirty="0"/>
           </a:p>
